--- a/Programação para Internet/Módulo 1 - HTML e CSS/Aula 07 - Introdução ao FlexGrid/Flex Box.pptx
+++ b/Programação para Internet/Módulo 1 - HTML e CSS/Aula 07 - Introdução ao FlexGrid/Flex Box.pptx
@@ -5,10 +5,10 @@
     <p:sldMasterId id="2147483677" r:id="rId1"/>
   </p:sldMasterIdLst>
   <p:notesMasterIdLst>
-    <p:notesMasterId r:id="rId9"/>
+    <p:notesMasterId r:id="rId10"/>
   </p:notesMasterIdLst>
   <p:handoutMasterIdLst>
-    <p:handoutMasterId r:id="rId10"/>
+    <p:handoutMasterId r:id="rId11"/>
   </p:handoutMasterIdLst>
   <p:sldIdLst>
     <p:sldId id="256" r:id="rId2"/>
@@ -18,6 +18,7 @@
     <p:sldId id="289" r:id="rId6"/>
     <p:sldId id="290" r:id="rId7"/>
     <p:sldId id="291" r:id="rId8"/>
+    <p:sldId id="292" r:id="rId9"/>
   </p:sldIdLst>
   <p:sldSz cx="12192000" cy="6858000"/>
   <p:notesSz cx="6888163" cy="10020300"/>
@@ -232,7 +233,7 @@
           <a:p>
             <a:fld id="{0F28648D-752F-4D9E-8EC2-61293C3E9BC7}" type="datetimeFigureOut">
               <a:rPr lang="pt-BR" smtClean="0"/>
-              <a:t>19/08/2026</a:t>
+              <a:t>20/08/2026</a:t>
             </a:fld>
             <a:endParaRPr lang="pt-BR"/>
           </a:p>
@@ -409,7 +410,7 @@
           <a:p>
             <a:fld id="{C67E822F-2664-47C4-8404-83B1D4D0E6EE}" type="datetimeFigureOut">
               <a:rPr lang="pt-BR" smtClean="0"/>
-              <a:t>19/08/2026</a:t>
+              <a:t>20/08/2026</a:t>
             </a:fld>
             <a:endParaRPr lang="pt-BR"/>
           </a:p>
@@ -1112,7 +1113,7 @@
           <a:p>
             <a:fld id="{CDD55C27-F8C6-4481-8569-CAC50CAE9F1F}" type="datetimeFigureOut">
               <a:rPr lang="pt-BR" smtClean="0"/>
-              <a:t>19/08/2026</a:t>
+              <a:t>20/08/2026</a:t>
             </a:fld>
             <a:endParaRPr lang="pt-BR"/>
           </a:p>
@@ -1617,7 +1618,7 @@
           <a:p>
             <a:fld id="{CDD55C27-F8C6-4481-8569-CAC50CAE9F1F}" type="datetimeFigureOut">
               <a:rPr lang="pt-BR" smtClean="0"/>
-              <a:t>19/08/2026</a:t>
+              <a:t>20/08/2026</a:t>
             </a:fld>
             <a:endParaRPr lang="pt-BR"/>
           </a:p>
@@ -1920,7 +1921,7 @@
           <a:p>
             <a:fld id="{CDD55C27-F8C6-4481-8569-CAC50CAE9F1F}" type="datetimeFigureOut">
               <a:rPr lang="pt-BR" smtClean="0"/>
-              <a:t>19/08/2026</a:t>
+              <a:t>20/08/2026</a:t>
             </a:fld>
             <a:endParaRPr lang="pt-BR"/>
           </a:p>
@@ -2371,7 +2372,7 @@
           <a:p>
             <a:fld id="{CDD55C27-F8C6-4481-8569-CAC50CAE9F1F}" type="datetimeFigureOut">
               <a:rPr lang="pt-BR" smtClean="0"/>
-              <a:t>19/08/2026</a:t>
+              <a:t>20/08/2026</a:t>
             </a:fld>
             <a:endParaRPr lang="pt-BR"/>
           </a:p>
@@ -2544,7 +2545,7 @@
           <a:p>
             <a:fld id="{CDD55C27-F8C6-4481-8569-CAC50CAE9F1F}" type="datetimeFigureOut">
               <a:rPr lang="pt-BR" smtClean="0"/>
-              <a:t>19/08/2026</a:t>
+              <a:t>20/08/2026</a:t>
             </a:fld>
             <a:endParaRPr lang="pt-BR"/>
           </a:p>
@@ -2681,7 +2682,7 @@
           <a:p>
             <a:fld id="{CDD55C27-F8C6-4481-8569-CAC50CAE9F1F}" type="datetimeFigureOut">
               <a:rPr lang="pt-BR" smtClean="0"/>
-              <a:t>19/08/2026</a:t>
+              <a:t>20/08/2026</a:t>
             </a:fld>
             <a:endParaRPr lang="pt-BR"/>
           </a:p>
@@ -3025,7 +3026,7 @@
           <a:p>
             <a:fld id="{CDD55C27-F8C6-4481-8569-CAC50CAE9F1F}" type="datetimeFigureOut">
               <a:rPr lang="pt-BR" smtClean="0"/>
-              <a:t>19/08/2026</a:t>
+              <a:t>20/08/2026</a:t>
             </a:fld>
             <a:endParaRPr lang="pt-BR"/>
           </a:p>
@@ -3346,7 +3347,7 @@
           <a:p>
             <a:fld id="{CDD55C27-F8C6-4481-8569-CAC50CAE9F1F}" type="datetimeFigureOut">
               <a:rPr lang="pt-BR" smtClean="0"/>
-              <a:t>19/08/2026</a:t>
+              <a:t>20/08/2026</a:t>
             </a:fld>
             <a:endParaRPr lang="pt-BR"/>
           </a:p>
@@ -12019,8 +12020,17 @@
               </a:avLst>
             </a:prstGeom>
             <a:solidFill>
-              <a:srgbClr val="043073"/>
+              <a:schemeClr val="accent2">
+                <a:lumMod val="75000"/>
+              </a:schemeClr>
             </a:solidFill>
+            <a:ln>
+              <a:solidFill>
+                <a:schemeClr val="accent2">
+                  <a:lumMod val="75000"/>
+                </a:schemeClr>
+              </a:solidFill>
+            </a:ln>
           </p:spPr>
           <p:style>
             <a:lnRef idx="2">
@@ -12076,8 +12086,17 @@
               </a:avLst>
             </a:prstGeom>
             <a:solidFill>
-              <a:srgbClr val="043073"/>
+              <a:schemeClr val="accent2">
+                <a:lumMod val="75000"/>
+              </a:schemeClr>
             </a:solidFill>
+            <a:ln>
+              <a:solidFill>
+                <a:schemeClr val="accent2">
+                  <a:lumMod val="75000"/>
+                </a:schemeClr>
+              </a:solidFill>
+            </a:ln>
           </p:spPr>
           <p:style>
             <a:lnRef idx="2">
@@ -12133,8 +12152,17 @@
               </a:avLst>
             </a:prstGeom>
             <a:solidFill>
-              <a:srgbClr val="043073"/>
+              <a:schemeClr val="accent2">
+                <a:lumMod val="75000"/>
+              </a:schemeClr>
             </a:solidFill>
+            <a:ln>
+              <a:solidFill>
+                <a:schemeClr val="accent2">
+                  <a:lumMod val="75000"/>
+                </a:schemeClr>
+              </a:solidFill>
+            </a:ln>
           </p:spPr>
           <p:style>
             <a:lnRef idx="2">
@@ -12190,8 +12218,17 @@
               </a:avLst>
             </a:prstGeom>
             <a:solidFill>
-              <a:srgbClr val="043073"/>
+              <a:schemeClr val="accent2">
+                <a:lumMod val="75000"/>
+              </a:schemeClr>
             </a:solidFill>
+            <a:ln>
+              <a:solidFill>
+                <a:schemeClr val="accent2">
+                  <a:lumMod val="75000"/>
+                </a:schemeClr>
+              </a:solidFill>
+            </a:ln>
           </p:spPr>
           <p:style>
             <a:lnRef idx="2">
@@ -12247,8 +12284,17 @@
               </a:avLst>
             </a:prstGeom>
             <a:solidFill>
-              <a:srgbClr val="043073"/>
+              <a:schemeClr val="accent2">
+                <a:lumMod val="75000"/>
+              </a:schemeClr>
             </a:solidFill>
+            <a:ln>
+              <a:solidFill>
+                <a:schemeClr val="accent2">
+                  <a:lumMod val="75000"/>
+                </a:schemeClr>
+              </a:solidFill>
+            </a:ln>
           </p:spPr>
           <p:style>
             <a:lnRef idx="2">
@@ -12590,8 +12636,17 @@
             </a:avLst>
           </a:prstGeom>
           <a:solidFill>
-            <a:srgbClr val="043073"/>
+            <a:schemeClr val="accent2">
+              <a:lumMod val="75000"/>
+            </a:schemeClr>
           </a:solidFill>
+          <a:ln>
+            <a:solidFill>
+              <a:schemeClr val="accent2">
+                <a:lumMod val="75000"/>
+              </a:schemeClr>
+            </a:solidFill>
+          </a:ln>
         </p:spPr>
         <p:style>
           <a:lnRef idx="2">
@@ -12647,8 +12702,17 @@
             </a:avLst>
           </a:prstGeom>
           <a:solidFill>
-            <a:srgbClr val="043073"/>
+            <a:schemeClr val="accent2">
+              <a:lumMod val="75000"/>
+            </a:schemeClr>
           </a:solidFill>
+          <a:ln>
+            <a:solidFill>
+              <a:schemeClr val="accent2">
+                <a:lumMod val="75000"/>
+              </a:schemeClr>
+            </a:solidFill>
+          </a:ln>
         </p:spPr>
         <p:style>
           <a:lnRef idx="2">
@@ -12704,8 +12768,17 @@
             </a:avLst>
           </a:prstGeom>
           <a:solidFill>
-            <a:srgbClr val="043073"/>
+            <a:schemeClr val="accent2">
+              <a:lumMod val="75000"/>
+            </a:schemeClr>
           </a:solidFill>
+          <a:ln>
+            <a:solidFill>
+              <a:schemeClr val="accent2">
+                <a:lumMod val="75000"/>
+              </a:schemeClr>
+            </a:solidFill>
+          </a:ln>
         </p:spPr>
         <p:style>
           <a:lnRef idx="2">
@@ -12761,8 +12834,17 @@
             </a:avLst>
           </a:prstGeom>
           <a:solidFill>
-            <a:srgbClr val="043073"/>
+            <a:schemeClr val="accent2">
+              <a:lumMod val="75000"/>
+            </a:schemeClr>
           </a:solidFill>
+          <a:ln>
+            <a:solidFill>
+              <a:schemeClr val="accent2">
+                <a:lumMod val="75000"/>
+              </a:schemeClr>
+            </a:solidFill>
+          </a:ln>
         </p:spPr>
         <p:style>
           <a:lnRef idx="2">
@@ -12818,8 +12900,17 @@
             </a:avLst>
           </a:prstGeom>
           <a:solidFill>
-            <a:srgbClr val="043073"/>
+            <a:schemeClr val="accent2">
+              <a:lumMod val="75000"/>
+            </a:schemeClr>
           </a:solidFill>
+          <a:ln>
+            <a:solidFill>
+              <a:schemeClr val="accent2">
+                <a:lumMod val="75000"/>
+              </a:schemeClr>
+            </a:solidFill>
+          </a:ln>
         </p:spPr>
         <p:style>
           <a:lnRef idx="2">
@@ -12856,6 +12947,86 @@
     <p:extLst>
       <p:ext uri="{BB962C8B-B14F-4D97-AF65-F5344CB8AC3E}">
         <p14:creationId xmlns:p14="http://schemas.microsoft.com/office/powerpoint/2010/main" val="3337518399"/>
+      </p:ext>
+    </p:extLst>
+  </p:cSld>
+  <p:clrMapOvr>
+    <a:masterClrMapping/>
+  </p:clrMapOvr>
+</p:sld>
+</file>
+
+<file path=ppt/slides/slide8.xml><?xml version="1.0" encoding="utf-8"?>
+<p:sld xmlns:a="http://schemas.openxmlformats.org/drawingml/2006/main" xmlns:r="http://schemas.openxmlformats.org/officeDocument/2006/relationships" xmlns:p="http://schemas.openxmlformats.org/presentationml/2006/main">
+  <p:cSld>
+    <p:spTree>
+      <p:nvGrpSpPr>
+        <p:cNvPr id="1" name=""/>
+        <p:cNvGrpSpPr/>
+        <p:nvPr/>
+      </p:nvGrpSpPr>
+      <p:grpSpPr>
+        <a:xfrm>
+          <a:off x="0" y="0"/>
+          <a:ext cx="0" cy="0"/>
+          <a:chOff x="0" y="0"/>
+          <a:chExt cx="0" cy="0"/>
+        </a:xfrm>
+      </p:grpSpPr>
+      <p:sp>
+        <p:nvSpPr>
+          <p:cNvPr id="2" name="Título 1">
+            <a:extLst>
+              <a:ext uri="{FF2B5EF4-FFF2-40B4-BE49-F238E27FC236}">
+                <a16:creationId xmlns:a16="http://schemas.microsoft.com/office/drawing/2014/main" id="{C94056CB-6BDF-66DD-E33B-FF47B6E2AB21}"/>
+              </a:ext>
+            </a:extLst>
+          </p:cNvPr>
+          <p:cNvSpPr>
+            <a:spLocks noGrp="1"/>
+          </p:cNvSpPr>
+          <p:nvPr>
+            <p:ph type="title"/>
+          </p:nvPr>
+        </p:nvSpPr>
+        <p:spPr/>
+        <p:txBody>
+          <a:bodyPr/>
+          <a:lstStyle/>
+          <a:p>
+            <a:endParaRPr lang="pt-BR"/>
+          </a:p>
+        </p:txBody>
+      </p:sp>
+      <p:sp>
+        <p:nvSpPr>
+          <p:cNvPr id="3" name="Espaço Reservado para Conteúdo 2">
+            <a:extLst>
+              <a:ext uri="{FF2B5EF4-FFF2-40B4-BE49-F238E27FC236}">
+                <a16:creationId xmlns:a16="http://schemas.microsoft.com/office/drawing/2014/main" id="{BD91EFAF-7FA9-7AE1-AFA2-C4E0A1B72802}"/>
+              </a:ext>
+            </a:extLst>
+          </p:cNvPr>
+          <p:cNvSpPr>
+            <a:spLocks noGrp="1"/>
+          </p:cNvSpPr>
+          <p:nvPr>
+            <p:ph idx="1"/>
+          </p:nvPr>
+        </p:nvSpPr>
+        <p:spPr/>
+        <p:txBody>
+          <a:bodyPr/>
+          <a:lstStyle/>
+          <a:p>
+            <a:endParaRPr lang="pt-BR"/>
+          </a:p>
+        </p:txBody>
+      </p:sp>
+    </p:spTree>
+    <p:extLst>
+      <p:ext uri="{BB962C8B-B14F-4D97-AF65-F5344CB8AC3E}">
+        <p14:creationId xmlns:p14="http://schemas.microsoft.com/office/powerpoint/2010/main" val="4252383437"/>
       </p:ext>
     </p:extLst>
   </p:cSld>
